--- a/site/clases/parte-1-machine-learning-clasico/064-class-imbalance-smote-adasyn-class-weight/clase-064-class-imbalance-smote-adasyn-class-weight-presentacion.pptx
+++ b/site/clases/parte-1-machine-learning-clasico/064-class-imbalance-smote-adasyn-class-weight/clase-064-class-imbalance-smote-adasyn-class-weight-presentacion.pptx
@@ -3272,7 +3272,7 @@
                 </a:solidFill>
                 <a:latin typeface="Segoe UI"/>
               </a:rPr>
-              <a:t>Parte: 1 — Machine Learning Clásico · Fuente: Chawla et al. (2002) SMOTE + He et al. (2008) ADASYN + imbalanced-learn docs.  Duración estimada: 80 min.</a:t>
+              <a:t>Parte: 1 — Machine Learning Clásico · Fuente: Chawla et al. (2002) SMOTE + He et al. (2008) ADASYN + imbalanced-learn docs.  Duración estimada: 80 min. · Nivel: Intermedio</a:t>
             </a:r>
           </a:p>
         </p:txBody>
@@ -3581,7 +3581,7 @@
                 </a:solidFill>
                 <a:latin typeface="Segoe UI"/>
               </a:rPr>
-              <a:t>Parte: 1 — Machine Learning Clásico · Fuente: Chawla et al. (2002) SMOTE + He et al. (2008) ADASYN + imbalanced-learn docs.  Duración estimada: 80 min.</a:t>
+              <a:t>Parte: 1 — Machine Learning Clásico · Fuente: Chawla et al. (2002) SMOTE + He et al. (2008) ADASYN + imbalanced-learn docs.  Duración estimada: 80 min. · Nivel: Intermedio</a:t>
             </a:r>
           </a:p>
         </p:txBody>
@@ -4333,7 +4333,7 @@
                 </a:solidFill>
                 <a:latin typeface="Segoe UI"/>
               </a:rPr>
-              <a:t>• ADASIN: como SMOTE pero con más densidad en zonas "difíciles".</a:t>
+              <a:t>• ADASYN: como SMOTE pero con más densidad en zonas "difíciles".</a:t>
             </a:r>
           </a:p>
           <a:p>
